--- a/팀프로젝트 관련 자료/3차발표.pptx
+++ b/팀프로젝트 관련 자료/3차발표.pptx
@@ -4962,7 +4962,7 @@
           <a:p>
             <a:fld id="{29574002-0C6E-4A9E-AC6A-FC4968BB1D5B}" type="datetimeFigureOut">
               <a:rPr lang="ko-KR" altLang="en-US" smtClean="0"/>
-              <a:t>2025-10-31</a:t>
+              <a:t>2025-11-03</a:t>
             </a:fld>
             <a:endParaRPr lang="ko-KR" altLang="en-US"/>
           </a:p>
@@ -5467,7 +5467,7 @@
           <a:p>
             <a:fld id="{3FB245E4-741B-46A9-94D1-0E241DD65ACD}" type="datetimeFigureOut">
               <a:rPr lang="ko-KR" altLang="en-US" smtClean="0"/>
-              <a:t>2025-10-31</a:t>
+              <a:t>2025-11-03</a:t>
             </a:fld>
             <a:endParaRPr lang="ko-KR" altLang="en-US"/>
           </a:p>
@@ -5665,7 +5665,7 @@
           <a:p>
             <a:fld id="{3FB245E4-741B-46A9-94D1-0E241DD65ACD}" type="datetimeFigureOut">
               <a:rPr lang="ko-KR" altLang="en-US" smtClean="0"/>
-              <a:t>2025-10-31</a:t>
+              <a:t>2025-11-03</a:t>
             </a:fld>
             <a:endParaRPr lang="ko-KR" altLang="en-US"/>
           </a:p>
@@ -5873,7 +5873,7 @@
           <a:p>
             <a:fld id="{3FB245E4-741B-46A9-94D1-0E241DD65ACD}" type="datetimeFigureOut">
               <a:rPr lang="ko-KR" altLang="en-US" smtClean="0"/>
-              <a:t>2025-10-31</a:t>
+              <a:t>2025-11-03</a:t>
             </a:fld>
             <a:endParaRPr lang="ko-KR" altLang="en-US"/>
           </a:p>
@@ -6386,7 +6386,7 @@
           <a:p>
             <a:fld id="{3FB245E4-741B-46A9-94D1-0E241DD65ACD}" type="datetimeFigureOut">
               <a:rPr lang="ko-KR" altLang="en-US" smtClean="0"/>
-              <a:t>2025-10-31</a:t>
+              <a:t>2025-11-03</a:t>
             </a:fld>
             <a:endParaRPr lang="ko-KR" altLang="en-US"/>
           </a:p>
@@ -6661,7 +6661,7 @@
           <a:p>
             <a:fld id="{3FB245E4-741B-46A9-94D1-0E241DD65ACD}" type="datetimeFigureOut">
               <a:rPr lang="ko-KR" altLang="en-US" smtClean="0"/>
-              <a:t>2025-10-31</a:t>
+              <a:t>2025-11-03</a:t>
             </a:fld>
             <a:endParaRPr lang="ko-KR" altLang="en-US"/>
           </a:p>
@@ -6926,7 +6926,7 @@
           <a:p>
             <a:fld id="{3FB245E4-741B-46A9-94D1-0E241DD65ACD}" type="datetimeFigureOut">
               <a:rPr lang="ko-KR" altLang="en-US" smtClean="0"/>
-              <a:t>2025-10-31</a:t>
+              <a:t>2025-11-03</a:t>
             </a:fld>
             <a:endParaRPr lang="ko-KR" altLang="en-US"/>
           </a:p>
@@ -7338,7 +7338,7 @@
           <a:p>
             <a:fld id="{3FB245E4-741B-46A9-94D1-0E241DD65ACD}" type="datetimeFigureOut">
               <a:rPr lang="ko-KR" altLang="en-US" smtClean="0"/>
-              <a:t>2025-10-31</a:t>
+              <a:t>2025-11-03</a:t>
             </a:fld>
             <a:endParaRPr lang="ko-KR" altLang="en-US"/>
           </a:p>
@@ -7479,7 +7479,7 @@
           <a:p>
             <a:fld id="{3FB245E4-741B-46A9-94D1-0E241DD65ACD}" type="datetimeFigureOut">
               <a:rPr lang="ko-KR" altLang="en-US" smtClean="0"/>
-              <a:t>2025-10-31</a:t>
+              <a:t>2025-11-03</a:t>
             </a:fld>
             <a:endParaRPr lang="ko-KR" altLang="en-US"/>
           </a:p>
@@ -7592,7 +7592,7 @@
           <a:p>
             <a:fld id="{3FB245E4-741B-46A9-94D1-0E241DD65ACD}" type="datetimeFigureOut">
               <a:rPr lang="ko-KR" altLang="en-US" smtClean="0"/>
-              <a:t>2025-10-31</a:t>
+              <a:t>2025-11-03</a:t>
             </a:fld>
             <a:endParaRPr lang="ko-KR" altLang="en-US"/>
           </a:p>
@@ -7903,7 +7903,7 @@
           <a:p>
             <a:fld id="{3FB245E4-741B-46A9-94D1-0E241DD65ACD}" type="datetimeFigureOut">
               <a:rPr lang="ko-KR" altLang="en-US" smtClean="0"/>
-              <a:t>2025-10-31</a:t>
+              <a:t>2025-11-03</a:t>
             </a:fld>
             <a:endParaRPr lang="ko-KR" altLang="en-US"/>
           </a:p>
@@ -8191,7 +8191,7 @@
           <a:p>
             <a:fld id="{3FB245E4-741B-46A9-94D1-0E241DD65ACD}" type="datetimeFigureOut">
               <a:rPr lang="ko-KR" altLang="en-US" smtClean="0"/>
-              <a:t>2025-10-31</a:t>
+              <a:t>2025-11-03</a:t>
             </a:fld>
             <a:endParaRPr lang="ko-KR" altLang="en-US"/>
           </a:p>
@@ -8432,7 +8432,7 @@
           <a:p>
             <a:fld id="{3FB245E4-741B-46A9-94D1-0E241DD65ACD}" type="datetimeFigureOut">
               <a:rPr lang="ko-KR" altLang="en-US" smtClean="0"/>
-              <a:t>2025-10-31</a:t>
+              <a:t>2025-11-03</a:t>
             </a:fld>
             <a:endParaRPr lang="ko-KR" altLang="en-US"/>
           </a:p>
@@ -24886,7 +24886,7 @@
           <p:spPr>
             <a:xfrm>
               <a:off x="5064272" y="4453027"/>
-              <a:ext cx="2122307" cy="278218"/>
+              <a:ext cx="2122307" cy="481350"/>
             </a:xfrm>
             <a:prstGeom prst="rect">
               <a:avLst/>
@@ -24906,7 +24906,7 @@
                 <a:defRPr/>
               </a:pPr>
               <a:r>
-                <a:rPr lang="ko-KR" altLang="en-US" sz="1200" b="1" dirty="0">
+                <a:rPr lang="en-US" altLang="ko-KR" sz="1200" b="1" dirty="0">
                   <a:ln>
                     <a:solidFill>
                       <a:schemeClr val="accent1">
@@ -24918,22 +24918,7 @@
                   <a:latin typeface="맑은 고딕" panose="020B0503020000020004" pitchFamily="50" charset="-127"/>
                   <a:ea typeface="맑은 고딕" panose="020B0503020000020004" pitchFamily="50" charset="-127"/>
                 </a:rPr>
-                <a:t>개발환경</a:t>
-              </a:r>
-              <a:r>
-                <a:rPr lang="ko-KR" altLang="en-US" sz="1200" dirty="0">
-                  <a:ln>
-                    <a:solidFill>
-                      <a:schemeClr val="accent1">
-                        <a:shade val="15000"/>
-                        <a:alpha val="0"/>
-                      </a:schemeClr>
-                    </a:solidFill>
-                  </a:ln>
-                  <a:latin typeface="맑은 고딕" panose="020B0503020000020004" pitchFamily="50" charset="-127"/>
-                  <a:ea typeface="맑은 고딕" panose="020B0503020000020004" pitchFamily="50" charset="-127"/>
-                </a:rPr>
-                <a:t> 등</a:t>
+                <a:t>React Native, Spring Boot, Flask, MariaDB</a:t>
               </a:r>
               <a:endParaRPr lang="en-US" altLang="ko-KR" sz="1200" dirty="0">
                 <a:ln>
@@ -26936,7 +26921,7 @@
           <p:nvPr>
             <p:extLst>
               <p:ext uri="{D42A27DB-BD31-4B8C-83A1-F6EECF244321}">
-                <p14:modId xmlns:p14="http://schemas.microsoft.com/office/powerpoint/2010/main" val="139542980"/>
+                <p14:modId xmlns:p14="http://schemas.microsoft.com/office/powerpoint/2010/main" val="117045972"/>
               </p:ext>
             </p:extLst>
           </p:nvPr>
@@ -27234,7 +27219,7 @@
                           <a:ea typeface="맑은 고딕" panose="020B0503020000020004" pitchFamily="50" charset="-127"/>
                           <a:cs typeface="+mn-cs"/>
                         </a:rPr>
-                        <a:t>김○○</a:t>
+                        <a:t>김현수</a:t>
                       </a:r>
                       <a:endParaRPr lang="ko-KR" altLang="en-US" sz="1600" b="1" i="0" kern="1200" dirty="0">
                         <a:ln>
@@ -27555,7 +27540,7 @@
                           <a:ea typeface="맑은 고딕" panose="020B0503020000020004" pitchFamily="50" charset="-127"/>
                           <a:cs typeface="+mn-cs"/>
                         </a:rPr>
-                        <a:t>박○○</a:t>
+                        <a:t>장지원</a:t>
                       </a:r>
                       <a:endParaRPr lang="ko-KR" altLang="en-US" sz="1600" b="1" i="0" kern="1200" dirty="0">
                         <a:ln>
@@ -27881,7 +27866,7 @@
                         <a:defRPr/>
                       </a:pPr>
                       <a:r>
-                        <a:rPr lang="ko-KR" altLang="en-US" sz="1600" b="1" i="0" kern="1200" noProof="0" dirty="0">
+                        <a:rPr lang="ko-KR" altLang="en-US" sz="1600" b="1" i="0" kern="1200" noProof="0" dirty="0" err="1">
                           <a:ln>
                             <a:solidFill>
                               <a:schemeClr val="bg1">
@@ -27898,8 +27883,25 @@
                           <a:ea typeface="맑은 고딕" panose="020B0503020000020004" pitchFamily="50" charset="-127"/>
                           <a:cs typeface="+mn-cs"/>
                         </a:rPr>
-                        <a:t>정○○</a:t>
+                        <a:t>정찬휘</a:t>
                       </a:r>
+                      <a:endParaRPr lang="ko-KR" altLang="en-US" sz="1600" b="1" i="0" kern="1200" noProof="0" dirty="0">
+                        <a:ln>
+                          <a:solidFill>
+                            <a:schemeClr val="bg1">
+                              <a:alpha val="0"/>
+                            </a:schemeClr>
+                          </a:solidFill>
+                        </a:ln>
+                        <a:solidFill>
+                          <a:schemeClr val="bg2">
+                            <a:lumMod val="25000"/>
+                          </a:schemeClr>
+                        </a:solidFill>
+                        <a:latin typeface="맑은 고딕" panose="020B0503020000020004" pitchFamily="50" charset="-127"/>
+                        <a:ea typeface="맑은 고딕" panose="020B0503020000020004" pitchFamily="50" charset="-127"/>
+                        <a:cs typeface="+mn-cs"/>
+                      </a:endParaRPr>
                     </a:p>
                   </a:txBody>
                   <a:tcPr marT="45741" marB="45741" anchor="ctr">
@@ -28208,7 +28210,7 @@
                           <a:ea typeface="맑은 고딕" panose="020B0503020000020004" pitchFamily="50" charset="-127"/>
                           <a:cs typeface="+mn-cs"/>
                         </a:rPr>
-                        <a:t>이○○</a:t>
+                        <a:t>이근형</a:t>
                       </a:r>
                     </a:p>
                   </a:txBody>
@@ -28311,7 +28313,7 @@
                           <a:ea typeface="맑은 고딕" panose="020B0503020000020004" pitchFamily="50" charset="-127"/>
                           <a:cs typeface="+mn-cs"/>
                         </a:rPr>
-                        <a:t>멘토</a:t>
+                        <a:t>팀원</a:t>
                       </a:r>
                     </a:p>
                   </a:txBody>
